--- a/BaoCaoKTM_NhomTripleCode/SlideBaoCaoKetThucMon_Nhom01.pptx
+++ b/BaoCaoKTM_NhomTripleCode/SlideBaoCaoKetThucMon_Nhom01.pptx
@@ -5784,7 +5784,7 @@
               <a:t>KISS: </a:t>
             </a:r>
             <a:r>
-              <a:rPr lang="" altLang="en-US" sz="1400">
+              <a:rPr lang="en-US" altLang="en-US" sz="1400">
                 <a:latin typeface="Times New Roman" panose="02020603050405020304"/>
                 <a:ea typeface="Times New Roman" panose="02020603050405020304"/>
               </a:rPr>
@@ -7032,7 +7032,7 @@
               <a:t>Quy tắc r</a:t>
             </a:r>
             <a:r>
-              <a:rPr lang="" altLang="en-US" sz="1400" b="1">
+              <a:rPr lang="en-US" altLang="en-US" sz="1400" b="1">
                 <a:latin typeface="Times New Roman" panose="02020603050405020304"/>
                 <a:ea typeface="Times New Roman" panose="02020603050405020304"/>
               </a:rPr>
@@ -7088,21 +7088,21 @@
               <a:t>Status Code r</a:t>
             </a:r>
             <a:r>
-              <a:rPr lang="" altLang="en-US" sz="1400" b="1">
-                <a:latin typeface="Times New Roman" panose="02020603050405020304"/>
-                <a:ea typeface="Times New Roman" panose="02020603050405020304"/>
-              </a:rPr>
-              <a:t>õ</a:t>
-            </a:r>
-            <a:r>
               <a:rPr lang="en-US" altLang="en-US" sz="1400" b="1">
                 <a:latin typeface="Times New Roman" panose="02020603050405020304"/>
                 <a:ea typeface="Times New Roman" panose="02020603050405020304"/>
               </a:rPr>
+              <a:t>õ</a:t>
+            </a:r>
+            <a:r>
+              <a:rPr lang="en-US" altLang="en-US" sz="1400" b="1">
+                <a:latin typeface="Times New Roman" panose="02020603050405020304"/>
+                <a:ea typeface="Times New Roman" panose="02020603050405020304"/>
+              </a:rPr>
               <a:t> ngh</a:t>
             </a:r>
             <a:r>
-              <a:rPr lang="" altLang="en-US" sz="1400" b="1">
+              <a:rPr lang="en-US" altLang="en-US" sz="1400" b="1">
                 <a:latin typeface="Times New Roman" panose="02020603050405020304"/>
                 <a:ea typeface="Times New Roman" panose="02020603050405020304"/>
               </a:rPr>
@@ -7165,21 +7165,21 @@
               <a:t>Quản l</a:t>
             </a:r>
             <a:r>
-              <a:rPr lang="" altLang="en-US" sz="1400">
-                <a:latin typeface="Times New Roman" panose="02020603050405020304"/>
-                <a:ea typeface="Times New Roman" panose="02020603050405020304"/>
-              </a:rPr>
-              <a:t>ý</a:t>
-            </a:r>
-            <a:r>
               <a:rPr lang="en-US" altLang="en-US" sz="1400">
                 <a:latin typeface="Times New Roman" panose="02020603050405020304"/>
                 <a:ea typeface="Times New Roman" panose="02020603050405020304"/>
               </a:rPr>
+              <a:t>ý</a:t>
+            </a:r>
+            <a:r>
+              <a:rPr lang="en-US" altLang="en-US" sz="1400">
+                <a:latin typeface="Times New Roman" panose="02020603050405020304"/>
+                <a:ea typeface="Times New Roman" panose="02020603050405020304"/>
+              </a:rPr>
               <a:t> thực </a:t>
             </a:r>
             <a:r>
-              <a:rPr lang="" altLang="en-US" sz="1400">
+              <a:rPr lang="en-US" altLang="en-US" sz="1400">
                 <a:latin typeface="Times New Roman" panose="02020603050405020304"/>
                 <a:ea typeface="Times New Roman" panose="02020603050405020304"/>
               </a:rPr>
@@ -7214,35 +7214,35 @@
               <a:t>/api/auth: </a:t>
             </a:r>
             <a:r>
-              <a:rPr lang="" altLang="en-US" sz="1400">
-                <a:latin typeface="Times New Roman" panose="02020603050405020304"/>
-                <a:ea typeface="Times New Roman" panose="02020603050405020304"/>
-              </a:rPr>
-              <a:t>Đă</a:t>
-            </a:r>
-            <a:r>
               <a:rPr lang="en-US" altLang="en-US" sz="1400">
                 <a:latin typeface="Times New Roman" panose="02020603050405020304"/>
                 <a:ea typeface="Times New Roman" panose="02020603050405020304"/>
               </a:rPr>
-              <a:t>ng k</a:t>
-            </a:r>
-            <a:r>
-              <a:rPr lang="" altLang="en-US" sz="1400">
-                <a:latin typeface="Times New Roman" panose="02020603050405020304"/>
-                <a:ea typeface="Times New Roman" panose="02020603050405020304"/>
-              </a:rPr>
-              <a:t>ý</a:t>
+              <a:t>Đă</a:t>
             </a:r>
             <a:r>
               <a:rPr lang="en-US" altLang="en-US" sz="1400">
                 <a:latin typeface="Times New Roman" panose="02020603050405020304"/>
                 <a:ea typeface="Times New Roman" panose="02020603050405020304"/>
               </a:rPr>
+              <a:t>ng k</a:t>
+            </a:r>
+            <a:r>
+              <a:rPr lang="en-US" altLang="en-US" sz="1400">
+                <a:latin typeface="Times New Roman" panose="02020603050405020304"/>
+                <a:ea typeface="Times New Roman" panose="02020603050405020304"/>
+              </a:rPr>
+              <a:t>ý</a:t>
+            </a:r>
+            <a:r>
+              <a:rPr lang="en-US" altLang="en-US" sz="1400">
+                <a:latin typeface="Times New Roman" panose="02020603050405020304"/>
+                <a:ea typeface="Times New Roman" panose="02020603050405020304"/>
+              </a:rPr>
               <a:t> / </a:t>
             </a:r>
             <a:r>
-              <a:rPr lang="" altLang="en-US" sz="1400">
+              <a:rPr lang="en-US" altLang="en-US" sz="1400">
                 <a:latin typeface="Times New Roman" panose="02020603050405020304"/>
                 <a:ea typeface="Times New Roman" panose="02020603050405020304"/>
               </a:rPr>
@@ -7277,7 +7277,7 @@
               <a:t>/api/dat-ban: </a:t>
             </a:r>
             <a:r>
-              <a:rPr lang="" altLang="en-US" sz="1400">
+              <a:rPr lang="en-US" altLang="en-US" sz="1400">
                 <a:latin typeface="Times New Roman" panose="02020603050405020304"/>
                 <a:ea typeface="Times New Roman" panose="02020603050405020304"/>
               </a:rPr>
@@ -7319,35 +7319,35 @@
               <a:t>AI </a:t>
             </a:r>
             <a:r>
-              <a:rPr lang="" altLang="en-US" sz="1400">
-                <a:latin typeface="Times New Roman" panose="02020603050405020304"/>
-                <a:ea typeface="Times New Roman" panose="02020603050405020304"/>
-              </a:rPr>
-              <a:t>đư</a:t>
-            </a:r>
-            <a:r>
               <a:rPr lang="en-US" altLang="en-US" sz="1400">
                 <a:latin typeface="Times New Roman" panose="02020603050405020304"/>
                 <a:ea typeface="Times New Roman" panose="02020603050405020304"/>
               </a:rPr>
-              <a:t>a gợi </a:t>
-            </a:r>
-            <a:r>
-              <a:rPr lang="" altLang="en-US" sz="1400">
-                <a:latin typeface="Times New Roman" panose="02020603050405020304"/>
-                <a:ea typeface="Times New Roman" panose="02020603050405020304"/>
-              </a:rPr>
-              <a:t>ý</a:t>
+              <a:t>đư</a:t>
             </a:r>
             <a:r>
               <a:rPr lang="en-US" altLang="en-US" sz="1400">
                 <a:latin typeface="Times New Roman" panose="02020603050405020304"/>
                 <a:ea typeface="Times New Roman" panose="02020603050405020304"/>
               </a:rPr>
+              <a:t>a gợi </a:t>
+            </a:r>
+            <a:r>
+              <a:rPr lang="en-US" altLang="en-US" sz="1400">
+                <a:latin typeface="Times New Roman" panose="02020603050405020304"/>
+                <a:ea typeface="Times New Roman" panose="02020603050405020304"/>
+              </a:rPr>
+              <a:t>ý</a:t>
+            </a:r>
+            <a:r>
+              <a:rPr lang="en-US" altLang="en-US" sz="1400">
+                <a:latin typeface="Times New Roman" panose="02020603050405020304"/>
+                <a:ea typeface="Times New Roman" panose="02020603050405020304"/>
+              </a:rPr>
               <a:t> món </a:t>
             </a:r>
             <a:r>
-              <a:rPr lang="" altLang="en-US" sz="1400">
+              <a:rPr lang="en-US" altLang="en-US" sz="1400">
                 <a:latin typeface="Times New Roman" panose="02020603050405020304"/>
                 <a:ea typeface="Times New Roman" panose="02020603050405020304"/>
               </a:rPr>
@@ -7649,6 +7649,34 @@
           </a:p>
         </p:txBody>
       </p:sp>
+      <p:pic>
+        <p:nvPicPr>
+          <p:cNvPr id="5" name="Picture 1"/>
+          <p:cNvPicPr>
+            <a:picLocks noChangeAspect="1"/>
+          </p:cNvPicPr>
+          <p:nvPr/>
+        </p:nvPicPr>
+        <p:blipFill>
+          <a:blip r:embed="rId3"/>
+          <a:stretch>
+            <a:fillRect/>
+          </a:stretch>
+        </p:blipFill>
+        <p:spPr>
+          <a:xfrm>
+            <a:off x="3764915" y="2032000"/>
+            <a:ext cx="5353050" cy="4664075"/>
+          </a:xfrm>
+          <a:prstGeom prst="rect">
+            <a:avLst/>
+          </a:prstGeom>
+          <a:noFill/>
+          <a:ln>
+            <a:noFill/>
+          </a:ln>
+        </p:spPr>
+      </p:pic>
     </p:spTree>
   </p:cSld>
   <p:clrMapOvr>
@@ -9231,7 +9259,7 @@
               <a:t>Quản l</a:t>
             </a:r>
             <a:r>
-              <a:rPr lang="" altLang="en-US" sz="3200" b="1" dirty="0">
+              <a:rPr lang="en-US" altLang="en-US" sz="3200" b="1" dirty="0">
                 <a:solidFill>
                   <a:srgbClr val="288098"/>
                 </a:solidFill>
@@ -11959,6 +11987,30 @@
           <a:xfrm>
             <a:off x="20955" y="304800"/>
             <a:ext cx="2734945" cy="1995805"/>
+          </a:xfrm>
+          <a:prstGeom prst="rect">
+            <a:avLst/>
+          </a:prstGeom>
+        </p:spPr>
+      </p:pic>
+      <p:pic>
+        <p:nvPicPr>
+          <p:cNvPr id="2" name="Picture 1"/>
+          <p:cNvPicPr>
+            <a:picLocks noChangeAspect="1"/>
+          </p:cNvPicPr>
+          <p:nvPr/>
+        </p:nvPicPr>
+        <p:blipFill>
+          <a:blip r:embed="rId3"/>
+          <a:stretch>
+            <a:fillRect/>
+          </a:stretch>
+        </p:blipFill>
+        <p:spPr>
+          <a:xfrm>
+            <a:off x="4700905" y="1384300"/>
+            <a:ext cx="3657600" cy="5286375"/>
           </a:xfrm>
           <a:prstGeom prst="rect">
             <a:avLst/>
@@ -12952,7 +13004,7 @@
           </a:bodyPr>
           <a:p>
             <a:r>
-              <a:rPr lang="" altLang="en-US" sz="1600"/>
+              <a:rPr lang="en-US" altLang="en-US" sz="1600"/>
               <a:t>Đ</a:t>
             </a:r>
             <a:r>
@@ -12970,7 +13022,7 @@
               <a:t>Chuyển hệ thống sang microservices </a:t>
             </a:r>
             <a:r>
-              <a:rPr lang="" altLang="en-US" sz="1600"/>
+              <a:rPr lang="en-US" altLang="en-US" sz="1600"/>
               <a:t>đ</a:t>
             </a:r>
             <a:r>
@@ -12988,7 +13040,7 @@
               <a:t>Tích hợp thanh toán </a:t>
             </a:r>
             <a:r>
-              <a:rPr lang="" altLang="en-US" sz="1600"/>
+              <a:rPr lang="en-US" altLang="en-US" sz="1600"/>
               <a:t>đ</a:t>
             </a:r>
             <a:r>

--- a/BaoCaoKTM_NhomTripleCode/SlideBaoCaoKetThucMon_Nhom01.pptx
+++ b/BaoCaoKTM_NhomTripleCode/SlideBaoCaoKetThucMon_Nhom01.pptx
@@ -9131,6 +9131,34 @@
           </a:p>
         </p:txBody>
       </p:sp>
+      <p:pic>
+        <p:nvPicPr>
+          <p:cNvPr id="2" name="Picture 1"/>
+          <p:cNvPicPr>
+            <a:picLocks noChangeAspect="1"/>
+          </p:cNvPicPr>
+          <p:nvPr/>
+        </p:nvPicPr>
+        <p:blipFill>
+          <a:blip r:embed="rId3"/>
+          <a:stretch>
+            <a:fillRect/>
+          </a:stretch>
+        </p:blipFill>
+        <p:spPr>
+          <a:xfrm>
+            <a:off x="2180590" y="1909445"/>
+            <a:ext cx="8361045" cy="4701540"/>
+          </a:xfrm>
+          <a:prstGeom prst="rect">
+            <a:avLst/>
+          </a:prstGeom>
+          <a:noFill/>
+          <a:ln>
+            <a:noFill/>
+          </a:ln>
+        </p:spPr>
+      </p:pic>
     </p:spTree>
   </p:cSld>
   <p:clrMapOvr>
@@ -12153,7 +12181,7 @@
         <p:spPr>
           <a:xfrm>
             <a:off x="3981450" y="1600200"/>
-            <a:ext cx="8124825" cy="5507990"/>
+            <a:ext cx="8124825" cy="5053330"/>
           </a:xfrm>
           <a:prstGeom prst="rect">
             <a:avLst/>
@@ -12167,7 +12195,7 @@
         </p:spPr>
         <p:txBody>
           <a:bodyPr wrap="square" rtlCol="0" anchor="t">
-            <a:spAutoFit/>
+            <a:noAutofit/>
           </a:bodyPr>
           <a:p>
             <a:pPr algn="ctr"/>
@@ -12457,8 +12485,8 @@
         </p:blipFill>
         <p:spPr>
           <a:xfrm>
-            <a:off x="473075" y="2247900"/>
-            <a:ext cx="3581400" cy="3030855"/>
+            <a:off x="668655" y="2320290"/>
+            <a:ext cx="3004185" cy="2635250"/>
           </a:xfrm>
           <a:prstGeom prst="rect">
             <a:avLst/>
